--- a/docs/presentation.pptx
+++ b/docs/presentation.pptx
@@ -9608,7 +9608,7 @@
                 <a:ea typeface="Calibri" pitchFamily="34" charset="-122"/>
                 <a:cs typeface="Calibri" pitchFamily="34" charset="-120"/>
               </a:rPr>
-              <a:t>204 автоматических теста: права доступа, инструменты, расчёты, ПДн</a:t>
+              <a:t>345 автоматических тестов: права доступа, инструменты, расчёты, ПДн</a:t>
             </a:r>
             <a:endParaRPr lang="en-US" sz="1300" dirty="0"/>
           </a:p>
